--- a/docs/DevOps_Incident_Suite_Presentation.pptx
+++ b/docs/DevOps_Incident_Suite_Presentation.pptx
@@ -3198,7 +3198,7 @@
         <p:spPr>
           <a:xfrm>
             <a:off x="914400" y="3474720"/>
-            <a:ext cx="7315200" cy="457200"/>
+            <a:ext cx="7315200" cy="338554"/>
           </a:xfrm>
           <a:prstGeom prst="rect">
             <a:avLst/>
@@ -3220,8 +3220,22 @@
               </a:defRPr>
             </a:pPr>
             <a:r>
-              <a:t>AI Engineering Accelerator — Cohort 7</a:t>
-            </a:r>
+              <a:rPr dirty="0"/>
+              <a:t>AI Engineering Accelerator —</a:t>
+            </a:r>
+            <a:r>
+              <a:rPr lang="en-CA" dirty="0"/>
+              <a:t> Class </a:t>
+            </a:r>
+            <a:r>
+              <a:rPr dirty="0"/>
+              <a:t>7</a:t>
+            </a:r>
+            <a:r>
+              <a:rPr lang="en-CA" dirty="0"/>
+              <a:t> – Group 2</a:t>
+            </a:r>
+            <a:endParaRPr dirty="0"/>
           </a:p>
         </p:txBody>
       </p:sp>
@@ -3277,8 +3291,8 @@
         </p:nvSpPr>
         <p:spPr>
           <a:xfrm>
-            <a:off x="914400" y="4572000"/>
-            <a:ext cx="7315200" cy="457200"/>
+            <a:off x="914400" y="4635782"/>
+            <a:ext cx="7315200" cy="1200329"/>
           </a:xfrm>
           <a:prstGeom prst="rect">
             <a:avLst/>
@@ -3300,8 +3314,62 @@
               </a:defRPr>
             </a:pPr>
             <a:r>
+              <a:rPr dirty="0"/>
               <a:t>Wayne Johnston</a:t>
             </a:r>
+            <a:endParaRPr lang="en-CA" dirty="0"/>
+          </a:p>
+          <a:p>
+            <a:pPr algn="ctr">
+              <a:defRPr sz="1800" b="0">
+                <a:solidFill>
+                  <a:srgbClr val="FFFFFF"/>
+                </a:solidFill>
+                <a:latin typeface="Calibri"/>
+              </a:defRPr>
+            </a:pPr>
+            <a:r>
+              <a:rPr lang="en-CA" dirty="0"/>
+              <a:t>Ramesh </a:t>
+            </a:r>
+            <a:r>
+              <a:rPr lang="en-CA" dirty="0" err="1"/>
+              <a:t>Rajareddy</a:t>
+            </a:r>
+            <a:endParaRPr lang="en-CA" dirty="0"/>
+          </a:p>
+          <a:p>
+            <a:pPr algn="ctr">
+              <a:defRPr sz="1800" b="0">
+                <a:solidFill>
+                  <a:srgbClr val="FFFFFF"/>
+                </a:solidFill>
+                <a:latin typeface="Calibri"/>
+              </a:defRPr>
+            </a:pPr>
+            <a:r>
+              <a:rPr lang="en-CA" dirty="0"/>
+              <a:t>Sunil Joseph</a:t>
+            </a:r>
+          </a:p>
+          <a:p>
+            <a:pPr algn="ctr">
+              <a:defRPr sz="1800" b="0">
+                <a:solidFill>
+                  <a:srgbClr val="FFFFFF"/>
+                </a:solidFill>
+                <a:latin typeface="Calibri"/>
+              </a:defRPr>
+            </a:pPr>
+            <a:r>
+              <a:rPr lang="en-CA" dirty="0"/>
+              <a:t> Vinod </a:t>
+            </a:r>
+            <a:r>
+              <a:rPr lang="en-CA" dirty="0" err="1"/>
+              <a:t>Dasyam</a:t>
+            </a:r>
+            <a:endParaRPr dirty="0"/>
           </a:p>
         </p:txBody>
       </p:sp>
@@ -3313,7 +3381,7 @@
         </p:nvSpPr>
         <p:spPr>
           <a:xfrm>
-            <a:off x="914400" y="5029200"/>
+            <a:off x="914400" y="6129331"/>
             <a:ext cx="7315200" cy="365760"/>
           </a:xfrm>
           <a:prstGeom prst="rect">
@@ -3336,6 +3404,7 @@
               </a:defRPr>
             </a:pPr>
             <a:r>
+              <a:rPr dirty="0"/>
               <a:t>June 2026</a:t>
             </a:r>
           </a:p>
@@ -3349,7 +3418,7 @@
         </p:nvSpPr>
         <p:spPr>
           <a:xfrm>
-            <a:off x="914400" y="5669280"/>
+            <a:off x="914400" y="5831619"/>
             <a:ext cx="7315200" cy="365760"/>
           </a:xfrm>
           <a:prstGeom prst="rect">
@@ -3372,8 +3441,30 @@
               </a:defRPr>
             </a:pPr>
             <a:r>
-              <a:t>Built with Claude Opus 4.6  |  LangGraph  |  LangChain  |  Streamlit</a:t>
-            </a:r>
+              <a:rPr dirty="0"/>
+              <a:t>Built with Claude Opus 4.6  |  </a:t>
+            </a:r>
+            <a:r>
+              <a:rPr dirty="0" err="1"/>
+              <a:t>LangGraph</a:t>
+            </a:r>
+            <a:r>
+              <a:rPr dirty="0"/>
+              <a:t>  |  </a:t>
+            </a:r>
+            <a:r>
+              <a:rPr dirty="0" err="1"/>
+              <a:t>LangChain</a:t>
+            </a:r>
+            <a:r>
+              <a:rPr dirty="0"/>
+              <a:t>  |  </a:t>
+            </a:r>
+            <a:r>
+              <a:rPr dirty="0" err="1"/>
+              <a:t>Streamlit</a:t>
+            </a:r>
+            <a:endParaRPr dirty="0"/>
           </a:p>
         </p:txBody>
       </p:sp>
@@ -6920,8 +7011,8 @@
         </p:nvSpPr>
         <p:spPr>
           <a:xfrm>
-            <a:off x="731520" y="1143000"/>
-            <a:ext cx="7680960" cy="457200"/>
+            <a:off x="731520" y="1188720"/>
+            <a:ext cx="7680960" cy="338554"/>
           </a:xfrm>
           <a:prstGeom prst="rect">
             <a:avLst/>
@@ -6934,16 +7025,31 @@
           </a:bodyPr>
           <a:lstStyle/>
           <a:p>
-            <a:pPr algn="l">
-              <a:defRPr sz="1400" b="0">
-                <a:solidFill>
-                  <a:srgbClr val="888888"/>
+            <a:pPr>
+              <a:defRPr sz="1600" b="1">
+                <a:solidFill>
+                  <a:srgbClr val="6366F1"/>
                 </a:solidFill>
                 <a:latin typeface="Calibri"/>
               </a:defRPr>
             </a:pPr>
             <a:r>
-              <a:t>GitHub + Streamlit Cloud</a:t>
+              <a:rPr sz="1600" b="1" dirty="0" err="1">
+                <a:solidFill>
+                  <a:srgbClr val="6366F1"/>
+                </a:solidFill>
+                <a:latin typeface="Calibri"/>
+              </a:rPr>
+              <a:t>Streamlit</a:t>
+            </a:r>
+            <a:r>
+              <a:rPr sz="1600" b="1" dirty="0">
+                <a:solidFill>
+                  <a:srgbClr val="6366F1"/>
+                </a:solidFill>
+                <a:latin typeface="Calibri"/>
+              </a:rPr>
+              <a:t> Cloud</a:t>
             </a:r>
           </a:p>
         </p:txBody>
@@ -6956,7 +7062,7 @@
         </p:nvSpPr>
         <p:spPr>
           <a:xfrm>
-            <a:off x="731520" y="1828800"/>
+            <a:off x="731519" y="1845528"/>
             <a:ext cx="3657600" cy="365760"/>
           </a:xfrm>
           <a:prstGeom prst="rect">
@@ -6979,6 +7085,7 @@
               </a:defRPr>
             </a:pPr>
             <a:r>
+              <a:rPr dirty="0"/>
               <a:t>GitHub Repository</a:t>
             </a:r>
           </a:p>
@@ -6992,8 +7099,8 @@
         </p:nvSpPr>
         <p:spPr>
           <a:xfrm>
-            <a:off x="731520" y="2286000"/>
-            <a:ext cx="3657600" cy="365760"/>
+            <a:off x="731519" y="2331720"/>
+            <a:ext cx="5339671" cy="492443"/>
           </a:xfrm>
           <a:prstGeom prst="rect">
             <a:avLst/>
@@ -7006,6 +7113,20 @@
           </a:bodyPr>
           <a:lstStyle/>
           <a:p>
+            <a:pPr>
+              <a:defRPr sz="1300" b="0">
+                <a:solidFill>
+                  <a:srgbClr val="2D3436"/>
+                </a:solidFill>
+                <a:latin typeface="Calibri"/>
+              </a:defRPr>
+            </a:pPr>
+            <a:r>
+              <a:rPr lang="en-US" dirty="0"/>
+              <a:t>https://devops-incident-suite-main-group2.streamlit.app/</a:t>
+            </a:r>
+          </a:p>
+          <a:p>
             <a:pPr algn="l">
               <a:defRPr sz="1300" b="0">
                 <a:solidFill>
@@ -7014,9 +7135,7 @@
                 <a:latin typeface="Calibri"/>
               </a:defRPr>
             </a:pPr>
-            <a:r>
-              <a:t>github.com/wjohnston99/devops-incident-suite</a:t>
-            </a:r>
+            <a:endParaRPr dirty="0"/>
           </a:p>
         </p:txBody>
       </p:sp>
@@ -7167,7 +7286,7 @@
         </p:nvSpPr>
         <p:spPr>
           <a:xfrm>
-            <a:off x="731520" y="5303520"/>
+            <a:off x="731520" y="5280660"/>
             <a:ext cx="7680960" cy="731520"/>
           </a:xfrm>
           <a:prstGeom prst="rect">
@@ -7191,6 +7310,41 @@
             </a:pPr>
             <a:r>
               <a:t>Future: Flask API endpoint — core pipeline has zero Streamlit dependencies, enabling a Flask/FastAPI frontend swap with no agent changes.</a:t>
+            </a:r>
+          </a:p>
+        </p:txBody>
+      </p:sp>
+      <p:sp>
+        <p:nvSpPr>
+          <p:cNvPr id="11" name="TextBox 10">
+            <a:extLst>
+              <a:ext uri="{FF2B5EF4-FFF2-40B4-BE49-F238E27FC236}">
+                <a16:creationId xmlns:a16="http://schemas.microsoft.com/office/drawing/2014/main" id="{5FBD9171-4EAB-1A50-2679-731DEA93D3CC}"/>
+              </a:ext>
+            </a:extLst>
+          </p:cNvPr>
+          <p:cNvSpPr txBox="1"/>
+          <p:nvPr/>
+        </p:nvSpPr>
+        <p:spPr>
+          <a:xfrm>
+            <a:off x="731519" y="1493758"/>
+            <a:ext cx="6879266" cy="292388"/>
+          </a:xfrm>
+          <a:prstGeom prst="rect">
+            <a:avLst/>
+          </a:prstGeom>
+          <a:noFill/>
+        </p:spPr>
+        <p:txBody>
+          <a:bodyPr wrap="square">
+            <a:spAutoFit/>
+          </a:bodyPr>
+          <a:lstStyle/>
+          <a:p>
+            <a:r>
+              <a:rPr lang="en-US" sz="1300" dirty="0"/>
+              <a:t>https://devops-incident-suite-main-group2.streamlit.app/</a:t>
             </a:r>
           </a:p>
         </p:txBody>
